--- a/slides.pptx
+++ b/slides.pptx
@@ -718,7 +718,7 @@
           </a:lstStyle>
           <a:p>
             <a:fld id="{FFEE8BD1-4CD9-4E23-9BB3-F9FF5D2B01EB}" type="datetimeFigureOut">
-              <a:t>7/7/26</a:t>
+              <a:t>7/9/26</a:t>
             </a:fld>
             <a:endParaRPr lang="en-US"/>
           </a:p>
@@ -1370,7 +1370,7 @@
           <a:p>
             <a:fld id="{0C56C575-D94E-F044-B574-12900C1740FB}" type="datetimeFigureOut">
               <a:rPr lang="en-US" smtClean="0"/>
-              <a:t>7/7/26</a:t>
+              <a:t>7/9/26</a:t>
             </a:fld>
             <a:endParaRPr lang="en-US"/>
           </a:p>
@@ -1674,7 +1674,7 @@
           <a:p>
             <a:fld id="{0C56C575-D94E-F044-B574-12900C1740FB}" type="datetimeFigureOut">
               <a:rPr lang="en-US" smtClean="0"/>
-              <a:t>7/7/26</a:t>
+              <a:t>7/9/26</a:t>
             </a:fld>
             <a:endParaRPr lang="en-US"/>
           </a:p>
@@ -1872,7 +1872,7 @@
           <a:p>
             <a:fld id="{0C56C575-D94E-F044-B574-12900C1740FB}" type="datetimeFigureOut">
               <a:rPr lang="en-US" smtClean="0"/>
-              <a:t>7/7/26</a:t>
+              <a:t>7/9/26</a:t>
             </a:fld>
             <a:endParaRPr lang="en-US"/>
           </a:p>
@@ -2080,7 +2080,7 @@
           <a:p>
             <a:fld id="{0C56C575-D94E-F044-B574-12900C1740FB}" type="datetimeFigureOut">
               <a:rPr lang="en-US" smtClean="0"/>
-              <a:t>7/7/26</a:t>
+              <a:t>7/9/26</a:t>
             </a:fld>
             <a:endParaRPr lang="en-US"/>
           </a:p>
@@ -2429,7 +2429,7 @@
           <a:p>
             <a:fld id="{0C56C575-D94E-F044-B574-12900C1740FB}" type="datetimeFigureOut">
               <a:rPr lang="en-US" smtClean="0"/>
-              <a:t>7/7/26</a:t>
+              <a:t>7/9/26</a:t>
             </a:fld>
             <a:endParaRPr lang="en-US"/>
           </a:p>
@@ -2713,7 +2713,7 @@
           <a:p>
             <a:fld id="{0C56C575-D94E-F044-B574-12900C1740FB}" type="datetimeFigureOut">
               <a:rPr lang="en-US" smtClean="0"/>
-              <a:t>7/7/26</a:t>
+              <a:t>7/9/26</a:t>
             </a:fld>
             <a:endParaRPr lang="en-US"/>
           </a:p>
@@ -3092,7 +3092,7 @@
           <a:p>
             <a:fld id="{0C56C575-D94E-F044-B574-12900C1740FB}" type="datetimeFigureOut">
               <a:rPr lang="en-US" smtClean="0"/>
-              <a:t>7/7/26</a:t>
+              <a:t>7/9/26</a:t>
             </a:fld>
             <a:endParaRPr lang="en-US"/>
           </a:p>
@@ -3357,7 +3357,7 @@
           <a:p>
             <a:fld id="{0C56C575-D94E-F044-B574-12900C1740FB}" type="datetimeFigureOut">
               <a:rPr lang="en-US" smtClean="0"/>
-              <a:t>7/7/26</a:t>
+              <a:t>7/9/26</a:t>
             </a:fld>
             <a:endParaRPr lang="en-US"/>
           </a:p>
@@ -3769,7 +3769,7 @@
           <a:p>
             <a:fld id="{0C56C575-D94E-F044-B574-12900C1740FB}" type="datetimeFigureOut">
               <a:rPr lang="en-US" smtClean="0"/>
-              <a:t>7/7/26</a:t>
+              <a:t>7/9/26</a:t>
             </a:fld>
             <a:endParaRPr lang="en-US"/>
           </a:p>
@@ -3910,7 +3910,7 @@
           <a:p>
             <a:fld id="{0C56C575-D94E-F044-B574-12900C1740FB}" type="datetimeFigureOut">
               <a:rPr lang="en-US" smtClean="0"/>
-              <a:t>7/7/26</a:t>
+              <a:t>7/9/26</a:t>
             </a:fld>
             <a:endParaRPr lang="en-US"/>
           </a:p>
@@ -4023,7 +4023,7 @@
           <a:p>
             <a:fld id="{0C56C575-D94E-F044-B574-12900C1740FB}" type="datetimeFigureOut">
               <a:rPr lang="en-US" smtClean="0"/>
-              <a:t>7/7/26</a:t>
+              <a:t>7/9/26</a:t>
             </a:fld>
             <a:endParaRPr lang="en-US"/>
           </a:p>
@@ -4350,7 +4350,7 @@
           <a:p>
             <a:fld id="{0C56C575-D94E-F044-B574-12900C1740FB}" type="datetimeFigureOut">
               <a:rPr lang="en-US" smtClean="0"/>
-              <a:t>7/7/26</a:t>
+              <a:t>7/9/26</a:t>
             </a:fld>
             <a:endParaRPr lang="en-US"/>
           </a:p>
@@ -4591,7 +4591,7 @@
           <a:p>
             <a:fld id="{0C56C575-D94E-F044-B574-12900C1740FB}" type="datetimeFigureOut">
               <a:rPr lang="en-US" smtClean="0"/>
-              <a:t>7/7/26</a:t>
+              <a:t>7/9/26</a:t>
             </a:fld>
             <a:endParaRPr lang="en-US"/>
           </a:p>
@@ -5692,22 +5692,9 @@
           </a:lstStyle>
           <a:p>
             <a:r>
-              <a:rPr lang="en-US"/>
-              <a:t>Ritika Giri</a:t>
-            </a:r>
-          </a:p>
-          <a:p>
-            <a:r>
-              <a:rPr lang="en-US"/>
-              <a:t>Data Scientist, RCDS</a:t>
-            </a:r>
-          </a:p>
-          <a:p>
-            <a:r>
-              <a:rPr lang="en-US"/>
-              <a:t>r-giri@northwestern.edu</a:t>
-            </a:r>
-            <a:endParaRPr lang="en-US" dirty="0"/>
+              <a:rPr lang="en-US" dirty="0"/>
+              <a:t>Artur Baranov</a:t>
+            </a:r>
           </a:p>
         </p:txBody>
       </p:sp>
@@ -7331,18 +7318,6 @@
 </file>
 
 <file path=customXml/item1.xml><?xml version="1.0" encoding="utf-8"?>
-<p:properties xmlns:p="http://schemas.microsoft.com/office/2006/metadata/properties" xmlns:xsi="http://www.w3.org/2001/XMLSchema-instance" xmlns:pc="http://schemas.microsoft.com/office/infopath/2007/PartnerControls">
-  <documentManagement>
-    <Notes xmlns="2abaa01e-9938-407e-aa0b-10580c653abd" xsi:nil="true"/>
-    <TaxCatchAll xmlns="efce84db-8738-4c7b-9bdc-65b9500871f6" xsi:nil="true"/>
-    <lcf76f155ced4ddcb4097134ff3c332f xmlns="2abaa01e-9938-407e-aa0b-10580c653abd">
-      <Terms xmlns="http://schemas.microsoft.com/office/infopath/2007/PartnerControls"/>
-    </lcf76f155ced4ddcb4097134ff3c332f>
-  </documentManagement>
-</p:properties>
-</file>
-
-<file path=customXml/item2.xml><?xml version="1.0" encoding="utf-8"?>
 <ct:contentTypeSchema xmlns:ct="http://schemas.microsoft.com/office/2006/metadata/contentType" xmlns:ma="http://schemas.microsoft.com/office/2006/metadata/properties/metaAttributes" ct:_="" ma:_="" ma:contentTypeName="Document" ma:contentTypeID="0x010100A0BC9924B2BE754D9B1ADDA1D4CEDCCC" ma:contentTypeVersion="19" ma:contentTypeDescription="Create a new document." ma:contentTypeScope="" ma:versionID="7b22c85b2f8f6a1c666a353fcbffedd6">
   <xsd:schema xmlns:xsd="http://www.w3.org/2001/XMLSchema" xmlns:xs="http://www.w3.org/2001/XMLSchema" xmlns:p="http://schemas.microsoft.com/office/2006/metadata/properties" xmlns:ns2="2abaa01e-9938-407e-aa0b-10580c653abd" xmlns:ns3="7be34c64-93b8-4842-bfae-c3106b8c53c2" xmlns:ns4="efce84db-8738-4c7b-9bdc-65b9500871f6" targetNamespace="http://schemas.microsoft.com/office/2006/metadata/properties" ma:root="true" ma:fieldsID="f5169a24320b7be6acaef9b01dd42178" ns2:_="" ns3:_="" ns4:_="">
     <xsd:import namespace="2abaa01e-9938-407e-aa0b-10580c653abd"/>
@@ -7604,6 +7579,18 @@
 </ct:contentTypeSchema>
 </file>
 
+<file path=customXml/item2.xml><?xml version="1.0" encoding="utf-8"?>
+<p:properties xmlns:p="http://schemas.microsoft.com/office/2006/metadata/properties" xmlns:xsi="http://www.w3.org/2001/XMLSchema-instance" xmlns:pc="http://schemas.microsoft.com/office/infopath/2007/PartnerControls">
+  <documentManagement>
+    <Notes xmlns="2abaa01e-9938-407e-aa0b-10580c653abd" xsi:nil="true"/>
+    <TaxCatchAll xmlns="efce84db-8738-4c7b-9bdc-65b9500871f6" xsi:nil="true"/>
+    <lcf76f155ced4ddcb4097134ff3c332f xmlns="2abaa01e-9938-407e-aa0b-10580c653abd">
+      <Terms xmlns="http://schemas.microsoft.com/office/infopath/2007/PartnerControls"/>
+    </lcf76f155ced4ddcb4097134ff3c332f>
+  </documentManagement>
+</p:properties>
+</file>
+
 <file path=customXml/item3.xml><?xml version="1.0" encoding="utf-8"?>
 <?mso-contentType ?>
 <FormTemplates xmlns="http://schemas.microsoft.com/sharepoint/v3/contenttype/forms">
@@ -7614,17 +7601,6 @@
 </file>
 
 <file path=customXml/itemProps1.xml><?xml version="1.0" encoding="utf-8"?>
-<ds:datastoreItem xmlns:ds="http://schemas.openxmlformats.org/officeDocument/2006/customXml" ds:itemID="{3BE9614C-AFF3-4042-B96A-BCA0CA447D5C}">
-  <ds:schemaRefs>
-    <ds:schemaRef ds:uri="2abaa01e-9938-407e-aa0b-10580c653abd"/>
-    <ds:schemaRef ds:uri="efce84db-8738-4c7b-9bdc-65b9500871f6"/>
-    <ds:schemaRef ds:uri="http://schemas.microsoft.com/office/2006/metadata/properties"/>
-    <ds:schemaRef ds:uri="http://schemas.microsoft.com/office/infopath/2007/PartnerControls"/>
-  </ds:schemaRefs>
-</ds:datastoreItem>
-</file>
-
-<file path=customXml/itemProps2.xml><?xml version="1.0" encoding="utf-8"?>
 <ds:datastoreItem xmlns:ds="http://schemas.openxmlformats.org/officeDocument/2006/customXml" ds:itemID="{9504B126-1B3A-4D06-B784-5ACB07A3D410}">
   <ds:schemaRefs>
     <ds:schemaRef ds:uri="2abaa01e-9938-407e-aa0b-10580c653abd"/>
@@ -7644,6 +7620,17 @@
 </ds:datastoreItem>
 </file>
 
+<file path=customXml/itemProps2.xml><?xml version="1.0" encoding="utf-8"?>
+<ds:datastoreItem xmlns:ds="http://schemas.openxmlformats.org/officeDocument/2006/customXml" ds:itemID="{3BE9614C-AFF3-4042-B96A-BCA0CA447D5C}">
+  <ds:schemaRefs>
+    <ds:schemaRef ds:uri="2abaa01e-9938-407e-aa0b-10580c653abd"/>
+    <ds:schemaRef ds:uri="efce84db-8738-4c7b-9bdc-65b9500871f6"/>
+    <ds:schemaRef ds:uri="http://schemas.microsoft.com/office/2006/metadata/properties"/>
+    <ds:schemaRef ds:uri="http://schemas.microsoft.com/office/infopath/2007/PartnerControls"/>
+  </ds:schemaRefs>
+</ds:datastoreItem>
+</file>
+
 <file path=customXml/itemProps3.xml><?xml version="1.0" encoding="utf-8"?>
 <ds:datastoreItem xmlns:ds="http://schemas.openxmlformats.org/officeDocument/2006/customXml" ds:itemID="{D2D699D9-1B31-4616-8FB0-B4CEE1C49142}">
   <ds:schemaRefs>

--- a/slides.pptx
+++ b/slides.pptx
@@ -5,7 +5,7 @@
     <p:sldMasterId id="2147483648" r:id="rId4"/>
   </p:sldMasterIdLst>
   <p:notesMasterIdLst>
-    <p:notesMasterId r:id="rId17"/>
+    <p:notesMasterId r:id="rId18"/>
   </p:notesMasterIdLst>
   <p:sldIdLst>
     <p:sldId id="259" r:id="rId5"/>
@@ -20,6 +20,7 @@
     <p:sldId id="310" r:id="rId14"/>
     <p:sldId id="311" r:id="rId15"/>
     <p:sldId id="312" r:id="rId16"/>
+    <p:sldId id="313" r:id="rId17"/>
   </p:sldIdLst>
   <p:sldSz cx="12192000" cy="6858000"/>
   <p:notesSz cx="6858000" cy="9144000"/>
@@ -718,7 +719,7 @@
           </a:lstStyle>
           <a:p>
             <a:fld id="{FFEE8BD1-4CD9-4E23-9BB3-F9FF5D2B01EB}" type="datetimeFigureOut">
-              <a:t>7/9/26</a:t>
+              <a:t>7/14/26</a:t>
             </a:fld>
             <a:endParaRPr lang="en-US"/>
           </a:p>
@@ -1370,7 +1371,7 @@
           <a:p>
             <a:fld id="{0C56C575-D94E-F044-B574-12900C1740FB}" type="datetimeFigureOut">
               <a:rPr lang="en-US" smtClean="0"/>
-              <a:t>7/9/26</a:t>
+              <a:t>7/14/26</a:t>
             </a:fld>
             <a:endParaRPr lang="en-US"/>
           </a:p>
@@ -1674,7 +1675,7 @@
           <a:p>
             <a:fld id="{0C56C575-D94E-F044-B574-12900C1740FB}" type="datetimeFigureOut">
               <a:rPr lang="en-US" smtClean="0"/>
-              <a:t>7/9/26</a:t>
+              <a:t>7/14/26</a:t>
             </a:fld>
             <a:endParaRPr lang="en-US"/>
           </a:p>
@@ -1872,7 +1873,7 @@
           <a:p>
             <a:fld id="{0C56C575-D94E-F044-B574-12900C1740FB}" type="datetimeFigureOut">
               <a:rPr lang="en-US" smtClean="0"/>
-              <a:t>7/9/26</a:t>
+              <a:t>7/14/26</a:t>
             </a:fld>
             <a:endParaRPr lang="en-US"/>
           </a:p>
@@ -2080,7 +2081,7 @@
           <a:p>
             <a:fld id="{0C56C575-D94E-F044-B574-12900C1740FB}" type="datetimeFigureOut">
               <a:rPr lang="en-US" smtClean="0"/>
-              <a:t>7/9/26</a:t>
+              <a:t>7/14/26</a:t>
             </a:fld>
             <a:endParaRPr lang="en-US"/>
           </a:p>
@@ -2429,7 +2430,7 @@
           <a:p>
             <a:fld id="{0C56C575-D94E-F044-B574-12900C1740FB}" type="datetimeFigureOut">
               <a:rPr lang="en-US" smtClean="0"/>
-              <a:t>7/9/26</a:t>
+              <a:t>7/14/26</a:t>
             </a:fld>
             <a:endParaRPr lang="en-US"/>
           </a:p>
@@ -2713,7 +2714,7 @@
           <a:p>
             <a:fld id="{0C56C575-D94E-F044-B574-12900C1740FB}" type="datetimeFigureOut">
               <a:rPr lang="en-US" smtClean="0"/>
-              <a:t>7/9/26</a:t>
+              <a:t>7/14/26</a:t>
             </a:fld>
             <a:endParaRPr lang="en-US"/>
           </a:p>
@@ -3092,7 +3093,7 @@
           <a:p>
             <a:fld id="{0C56C575-D94E-F044-B574-12900C1740FB}" type="datetimeFigureOut">
               <a:rPr lang="en-US" smtClean="0"/>
-              <a:t>7/9/26</a:t>
+              <a:t>7/14/26</a:t>
             </a:fld>
             <a:endParaRPr lang="en-US"/>
           </a:p>
@@ -3357,7 +3358,7 @@
           <a:p>
             <a:fld id="{0C56C575-D94E-F044-B574-12900C1740FB}" type="datetimeFigureOut">
               <a:rPr lang="en-US" smtClean="0"/>
-              <a:t>7/9/26</a:t>
+              <a:t>7/14/26</a:t>
             </a:fld>
             <a:endParaRPr lang="en-US"/>
           </a:p>
@@ -3769,7 +3770,7 @@
           <a:p>
             <a:fld id="{0C56C575-D94E-F044-B574-12900C1740FB}" type="datetimeFigureOut">
               <a:rPr lang="en-US" smtClean="0"/>
-              <a:t>7/9/26</a:t>
+              <a:t>7/14/26</a:t>
             </a:fld>
             <a:endParaRPr lang="en-US"/>
           </a:p>
@@ -3910,7 +3911,7 @@
           <a:p>
             <a:fld id="{0C56C575-D94E-F044-B574-12900C1740FB}" type="datetimeFigureOut">
               <a:rPr lang="en-US" smtClean="0"/>
-              <a:t>7/9/26</a:t>
+              <a:t>7/14/26</a:t>
             </a:fld>
             <a:endParaRPr lang="en-US"/>
           </a:p>
@@ -4023,7 +4024,7 @@
           <a:p>
             <a:fld id="{0C56C575-D94E-F044-B574-12900C1740FB}" type="datetimeFigureOut">
               <a:rPr lang="en-US" smtClean="0"/>
-              <a:t>7/9/26</a:t>
+              <a:t>7/14/26</a:t>
             </a:fld>
             <a:endParaRPr lang="en-US"/>
           </a:p>
@@ -4350,7 +4351,7 @@
           <a:p>
             <a:fld id="{0C56C575-D94E-F044-B574-12900C1740FB}" type="datetimeFigureOut">
               <a:rPr lang="en-US" smtClean="0"/>
-              <a:t>7/9/26</a:t>
+              <a:t>7/14/26</a:t>
             </a:fld>
             <a:endParaRPr lang="en-US"/>
           </a:p>
@@ -4591,7 +4592,7 @@
           <a:p>
             <a:fld id="{0C56C575-D94E-F044-B574-12900C1740FB}" type="datetimeFigureOut">
               <a:rPr lang="en-US" smtClean="0"/>
-              <a:t>7/9/26</a:t>
+              <a:t>7/14/26</a:t>
             </a:fld>
             <a:endParaRPr lang="en-US"/>
           </a:p>
@@ -5445,6 +5446,102 @@
     <p:extLst>
       <p:ext uri="{BB962C8B-B14F-4D97-AF65-F5344CB8AC3E}">
         <p14:creationId xmlns:p14="http://schemas.microsoft.com/office/powerpoint/2010/main" val="3113469162"/>
+      </p:ext>
+    </p:extLst>
+  </p:cSld>
+  <p:clrMapOvr>
+    <a:masterClrMapping/>
+  </p:clrMapOvr>
+</p:sld>
+</file>
+
+<file path=ppt/slides/slide13.xml><?xml version="1.0" encoding="utf-8"?>
+<p:sld xmlns:a="http://schemas.openxmlformats.org/drawingml/2006/main" xmlns:r="http://schemas.openxmlformats.org/officeDocument/2006/relationships" xmlns:p="http://schemas.openxmlformats.org/presentationml/2006/main">
+  <p:cSld>
+    <p:spTree>
+      <p:nvGrpSpPr>
+        <p:cNvPr id="1" name=""/>
+        <p:cNvGrpSpPr/>
+        <p:nvPr/>
+      </p:nvGrpSpPr>
+      <p:grpSpPr>
+        <a:xfrm>
+          <a:off x="0" y="0"/>
+          <a:ext cx="0" cy="0"/>
+          <a:chOff x="0" y="0"/>
+          <a:chExt cx="0" cy="0"/>
+        </a:xfrm>
+      </p:grpSpPr>
+      <p:sp>
+        <p:nvSpPr>
+          <p:cNvPr id="2" name="Title 1">
+            <a:extLst>
+              <a:ext uri="{FF2B5EF4-FFF2-40B4-BE49-F238E27FC236}">
+                <a16:creationId xmlns:a16="http://schemas.microsoft.com/office/drawing/2014/main" id="{14CF6BC0-0A58-C776-A2A8-CE38B3043F5B}"/>
+              </a:ext>
+            </a:extLst>
+          </p:cNvPr>
+          <p:cNvSpPr>
+            <a:spLocks noGrp="1"/>
+          </p:cNvSpPr>
+          <p:nvPr>
+            <p:ph type="title"/>
+          </p:nvPr>
+        </p:nvSpPr>
+        <p:spPr>
+          <a:xfrm>
+            <a:off x="838200" y="243205"/>
+            <a:ext cx="10515600" cy="899795"/>
+          </a:xfrm>
+        </p:spPr>
+        <p:txBody>
+          <a:bodyPr anchor="ctr">
+            <a:normAutofit/>
+          </a:bodyPr>
+          <a:lstStyle/>
+          <a:p>
+            <a:r>
+              <a:rPr lang="en-US" dirty="0"/>
+              <a:t>Feedback</a:t>
+            </a:r>
+          </a:p>
+        </p:txBody>
+      </p:sp>
+      <p:pic>
+        <p:nvPicPr>
+          <p:cNvPr id="5" name="Picture 4">
+            <a:extLst>
+              <a:ext uri="{FF2B5EF4-FFF2-40B4-BE49-F238E27FC236}">
+                <a16:creationId xmlns:a16="http://schemas.microsoft.com/office/drawing/2014/main" id="{E3406C7F-7CEB-1B02-AE46-C7EA1F13359A}"/>
+              </a:ext>
+            </a:extLst>
+          </p:cNvPr>
+          <p:cNvPicPr>
+            <a:picLocks noChangeAspect="1"/>
+          </p:cNvPicPr>
+          <p:nvPr/>
+        </p:nvPicPr>
+        <p:blipFill>
+          <a:blip r:embed="rId2"/>
+          <a:stretch>
+            <a:fillRect/>
+          </a:stretch>
+        </p:blipFill>
+        <p:spPr>
+          <a:xfrm>
+            <a:off x="3744118" y="590310"/>
+            <a:ext cx="5586654" cy="5586654"/>
+          </a:xfrm>
+          <a:prstGeom prst="rect">
+            <a:avLst/>
+          </a:prstGeom>
+          <a:noFill/>
+        </p:spPr>
+      </p:pic>
+    </p:spTree>
+    <p:extLst>
+      <p:ext uri="{BB962C8B-B14F-4D97-AF65-F5344CB8AC3E}">
+        <p14:creationId xmlns:p14="http://schemas.microsoft.com/office/powerpoint/2010/main" val="2188304250"/>
       </p:ext>
     </p:extLst>
   </p:cSld>
@@ -7318,6 +7415,27 @@
 </file>
 
 <file path=customXml/item1.xml><?xml version="1.0" encoding="utf-8"?>
+<?mso-contentType ?>
+<FormTemplates xmlns="http://schemas.microsoft.com/sharepoint/v3/contenttype/forms">
+  <Display>DocumentLibraryForm</Display>
+  <Edit>DocumentLibraryForm</Edit>
+  <New>DocumentLibraryForm</New>
+</FormTemplates>
+</file>
+
+<file path=customXml/item2.xml><?xml version="1.0" encoding="utf-8"?>
+<p:properties xmlns:p="http://schemas.microsoft.com/office/2006/metadata/properties" xmlns:xsi="http://www.w3.org/2001/XMLSchema-instance" xmlns:pc="http://schemas.microsoft.com/office/infopath/2007/PartnerControls">
+  <documentManagement>
+    <Notes xmlns="2abaa01e-9938-407e-aa0b-10580c653abd" xsi:nil="true"/>
+    <TaxCatchAll xmlns="efce84db-8738-4c7b-9bdc-65b9500871f6" xsi:nil="true"/>
+    <lcf76f155ced4ddcb4097134ff3c332f xmlns="2abaa01e-9938-407e-aa0b-10580c653abd">
+      <Terms xmlns="http://schemas.microsoft.com/office/infopath/2007/PartnerControls"/>
+    </lcf76f155ced4ddcb4097134ff3c332f>
+  </documentManagement>
+</p:properties>
+</file>
+
+<file path=customXml/item3.xml><?xml version="1.0" encoding="utf-8"?>
 <ct:contentTypeSchema xmlns:ct="http://schemas.microsoft.com/office/2006/metadata/contentType" xmlns:ma="http://schemas.microsoft.com/office/2006/metadata/properties/metaAttributes" ct:_="" ma:_="" ma:contentTypeName="Document" ma:contentTypeID="0x010100A0BC9924B2BE754D9B1ADDA1D4CEDCCC" ma:contentTypeVersion="19" ma:contentTypeDescription="Create a new document." ma:contentTypeScope="" ma:versionID="7b22c85b2f8f6a1c666a353fcbffedd6">
   <xsd:schema xmlns:xsd="http://www.w3.org/2001/XMLSchema" xmlns:xs="http://www.w3.org/2001/XMLSchema" xmlns:p="http://schemas.microsoft.com/office/2006/metadata/properties" xmlns:ns2="2abaa01e-9938-407e-aa0b-10580c653abd" xmlns:ns3="7be34c64-93b8-4842-bfae-c3106b8c53c2" xmlns:ns4="efce84db-8738-4c7b-9bdc-65b9500871f6" targetNamespace="http://schemas.microsoft.com/office/2006/metadata/properties" ma:root="true" ma:fieldsID="f5169a24320b7be6acaef9b01dd42178" ns2:_="" ns3:_="" ns4:_="">
     <xsd:import namespace="2abaa01e-9938-407e-aa0b-10580c653abd"/>
@@ -7579,28 +7697,26 @@
 </ct:contentTypeSchema>
 </file>
 
-<file path=customXml/item2.xml><?xml version="1.0" encoding="utf-8"?>
-<p:properties xmlns:p="http://schemas.microsoft.com/office/2006/metadata/properties" xmlns:xsi="http://www.w3.org/2001/XMLSchema-instance" xmlns:pc="http://schemas.microsoft.com/office/infopath/2007/PartnerControls">
-  <documentManagement>
-    <Notes xmlns="2abaa01e-9938-407e-aa0b-10580c653abd" xsi:nil="true"/>
-    <TaxCatchAll xmlns="efce84db-8738-4c7b-9bdc-65b9500871f6" xsi:nil="true"/>
-    <lcf76f155ced4ddcb4097134ff3c332f xmlns="2abaa01e-9938-407e-aa0b-10580c653abd">
-      <Terms xmlns="http://schemas.microsoft.com/office/infopath/2007/PartnerControls"/>
-    </lcf76f155ced4ddcb4097134ff3c332f>
-  </documentManagement>
-</p:properties>
+<file path=customXml/itemProps1.xml><?xml version="1.0" encoding="utf-8"?>
+<ds:datastoreItem xmlns:ds="http://schemas.openxmlformats.org/officeDocument/2006/customXml" ds:itemID="{D2D699D9-1B31-4616-8FB0-B4CEE1C49142}">
+  <ds:schemaRefs>
+    <ds:schemaRef ds:uri="http://schemas.microsoft.com/sharepoint/v3/contenttype/forms"/>
+  </ds:schemaRefs>
+</ds:datastoreItem>
 </file>
 
-<file path=customXml/item3.xml><?xml version="1.0" encoding="utf-8"?>
-<?mso-contentType ?>
-<FormTemplates xmlns="http://schemas.microsoft.com/sharepoint/v3/contenttype/forms">
-  <Display>DocumentLibraryForm</Display>
-  <Edit>DocumentLibraryForm</Edit>
-  <New>DocumentLibraryForm</New>
-</FormTemplates>
+<file path=customXml/itemProps2.xml><?xml version="1.0" encoding="utf-8"?>
+<ds:datastoreItem xmlns:ds="http://schemas.openxmlformats.org/officeDocument/2006/customXml" ds:itemID="{3BE9614C-AFF3-4042-B96A-BCA0CA447D5C}">
+  <ds:schemaRefs>
+    <ds:schemaRef ds:uri="2abaa01e-9938-407e-aa0b-10580c653abd"/>
+    <ds:schemaRef ds:uri="efce84db-8738-4c7b-9bdc-65b9500871f6"/>
+    <ds:schemaRef ds:uri="http://schemas.microsoft.com/office/2006/metadata/properties"/>
+    <ds:schemaRef ds:uri="http://schemas.microsoft.com/office/infopath/2007/PartnerControls"/>
+  </ds:schemaRefs>
+</ds:datastoreItem>
 </file>
 
-<file path=customXml/itemProps1.xml><?xml version="1.0" encoding="utf-8"?>
+<file path=customXml/itemProps3.xml><?xml version="1.0" encoding="utf-8"?>
 <ds:datastoreItem xmlns:ds="http://schemas.openxmlformats.org/officeDocument/2006/customXml" ds:itemID="{9504B126-1B3A-4D06-B784-5ACB07A3D410}">
   <ds:schemaRefs>
     <ds:schemaRef ds:uri="2abaa01e-9938-407e-aa0b-10580c653abd"/>
@@ -7618,23 +7734,4 @@
     <ds:schemaRef ds:uri="http://www.w3.org/2001/XMLSchema"/>
   </ds:schemaRefs>
 </ds:datastoreItem>
-</file>
-
-<file path=customXml/itemProps2.xml><?xml version="1.0" encoding="utf-8"?>
-<ds:datastoreItem xmlns:ds="http://schemas.openxmlformats.org/officeDocument/2006/customXml" ds:itemID="{3BE9614C-AFF3-4042-B96A-BCA0CA447D5C}">
-  <ds:schemaRefs>
-    <ds:schemaRef ds:uri="2abaa01e-9938-407e-aa0b-10580c653abd"/>
-    <ds:schemaRef ds:uri="efce84db-8738-4c7b-9bdc-65b9500871f6"/>
-    <ds:schemaRef ds:uri="http://schemas.microsoft.com/office/2006/metadata/properties"/>
-    <ds:schemaRef ds:uri="http://schemas.microsoft.com/office/infopath/2007/PartnerControls"/>
-  </ds:schemaRefs>
-</ds:datastoreItem>
-</file>
-
-<file path=customXml/itemProps3.xml><?xml version="1.0" encoding="utf-8"?>
-<ds:datastoreItem xmlns:ds="http://schemas.openxmlformats.org/officeDocument/2006/customXml" ds:itemID="{D2D699D9-1B31-4616-8FB0-B4CEE1C49142}">
-  <ds:schemaRefs>
-    <ds:schemaRef ds:uri="http://schemas.microsoft.com/sharepoint/v3/contenttype/forms"/>
-  </ds:schemaRefs>
-</ds:datastoreItem>
 </file>